--- a/slides/session-1-fundamentals.pptx
+++ b/slides/session-1-fundamentals.pptx
@@ -18067,7 +18067,7 @@
               </a:defRPr>
             </a:pPr>
             <a:r>
-              <a:t>INITIAL.md — project bootstrap instructions</a:t>
+              <a:t>INITIAL.md — structured feature requests the AI can actually execute</a:t>
             </a:r>
           </a:p>
         </p:txBody>
@@ -18146,7 +18146,7 @@
               </a:defRPr>
             </a:pPr>
             <a:r>
-              <a:t>PRP (Prompt-Reusable Patterns) — reusable context documents</a:t>
+              <a:t>PRPs (Product Requirements Prompts) — implementation blueprints with validation gates</a:t>
             </a:r>
           </a:p>
         </p:txBody>
